--- a/prezentacie/p07w.pptx
+++ b/prezentacie/p07w.pptx
@@ -252,7 +252,7 @@
           <a:p>
             <a:fld id="{10052495-8BC8-4CFB-94B1-B0429F101A0D}" type="datetimeFigureOut">
               <a:rPr lang="sk-SK" smtClean="0"/>
-              <a:t>8. 10. 2025</a:t>
+              <a:t>25. 10. 2026</a:t>
             </a:fld>
             <a:endParaRPr lang="sk-SK"/>
           </a:p>
@@ -422,7 +422,7 @@
           <a:p>
             <a:fld id="{10052495-8BC8-4CFB-94B1-B0429F101A0D}" type="datetimeFigureOut">
               <a:rPr lang="sk-SK" smtClean="0"/>
-              <a:t>8. 10. 2025</a:t>
+              <a:t>25. 10. 2026</a:t>
             </a:fld>
             <a:endParaRPr lang="sk-SK"/>
           </a:p>
@@ -602,7 +602,7 @@
           <a:p>
             <a:fld id="{10052495-8BC8-4CFB-94B1-B0429F101A0D}" type="datetimeFigureOut">
               <a:rPr lang="sk-SK" smtClean="0"/>
-              <a:t>8. 10. 2025</a:t>
+              <a:t>25. 10. 2026</a:t>
             </a:fld>
             <a:endParaRPr lang="sk-SK"/>
           </a:p>
@@ -772,7 +772,7 @@
           <a:p>
             <a:fld id="{10052495-8BC8-4CFB-94B1-B0429F101A0D}" type="datetimeFigureOut">
               <a:rPr lang="sk-SK" smtClean="0"/>
-              <a:t>8. 10. 2025</a:t>
+              <a:t>25. 10. 2026</a:t>
             </a:fld>
             <a:endParaRPr lang="sk-SK"/>
           </a:p>
@@ -1018,7 +1018,7 @@
           <a:p>
             <a:fld id="{10052495-8BC8-4CFB-94B1-B0429F101A0D}" type="datetimeFigureOut">
               <a:rPr lang="sk-SK" smtClean="0"/>
-              <a:t>8. 10. 2025</a:t>
+              <a:t>25. 10. 2026</a:t>
             </a:fld>
             <a:endParaRPr lang="sk-SK"/>
           </a:p>
@@ -1250,7 +1250,7 @@
           <a:p>
             <a:fld id="{10052495-8BC8-4CFB-94B1-B0429F101A0D}" type="datetimeFigureOut">
               <a:rPr lang="sk-SK" smtClean="0"/>
-              <a:t>8. 10. 2025</a:t>
+              <a:t>25. 10. 2026</a:t>
             </a:fld>
             <a:endParaRPr lang="sk-SK"/>
           </a:p>
@@ -1617,7 +1617,7 @@
           <a:p>
             <a:fld id="{10052495-8BC8-4CFB-94B1-B0429F101A0D}" type="datetimeFigureOut">
               <a:rPr lang="sk-SK" smtClean="0"/>
-              <a:t>8. 10. 2025</a:t>
+              <a:t>25. 10. 2026</a:t>
             </a:fld>
             <a:endParaRPr lang="sk-SK"/>
           </a:p>
@@ -1735,7 +1735,7 @@
           <a:p>
             <a:fld id="{10052495-8BC8-4CFB-94B1-B0429F101A0D}" type="datetimeFigureOut">
               <a:rPr lang="sk-SK" smtClean="0"/>
-              <a:t>8. 10. 2025</a:t>
+              <a:t>25. 10. 2026</a:t>
             </a:fld>
             <a:endParaRPr lang="sk-SK"/>
           </a:p>
@@ -1830,7 +1830,7 @@
           <a:p>
             <a:fld id="{10052495-8BC8-4CFB-94B1-B0429F101A0D}" type="datetimeFigureOut">
               <a:rPr lang="sk-SK" smtClean="0"/>
-              <a:t>8. 10. 2025</a:t>
+              <a:t>25. 10. 2026</a:t>
             </a:fld>
             <a:endParaRPr lang="sk-SK"/>
           </a:p>
@@ -2107,7 +2107,7 @@
           <a:p>
             <a:fld id="{10052495-8BC8-4CFB-94B1-B0429F101A0D}" type="datetimeFigureOut">
               <a:rPr lang="sk-SK" smtClean="0"/>
-              <a:t>8. 10. 2025</a:t>
+              <a:t>25. 10. 2026</a:t>
             </a:fld>
             <a:endParaRPr lang="sk-SK"/>
           </a:p>
@@ -2364,7 +2364,7 @@
           <a:p>
             <a:fld id="{10052495-8BC8-4CFB-94B1-B0429F101A0D}" type="datetimeFigureOut">
               <a:rPr lang="sk-SK" smtClean="0"/>
-              <a:t>8. 10. 2025</a:t>
+              <a:t>25. 10. 2026</a:t>
             </a:fld>
             <a:endParaRPr lang="sk-SK"/>
           </a:p>
@@ -2577,7 +2577,7 @@
           <a:p>
             <a:fld id="{10052495-8BC8-4CFB-94B1-B0429F101A0D}" type="datetimeFigureOut">
               <a:rPr lang="sk-SK" smtClean="0"/>
-              <a:t>8. 10. 2025</a:t>
+              <a:t>25. 10. 2026</a:t>
             </a:fld>
             <a:endParaRPr lang="sk-SK"/>
           </a:p>
@@ -4654,15 +4654,32 @@
               <a:buNone/>
             </a:pPr>
             <a:r>
-              <a:rPr lang="sk-SK" dirty="0"/>
+              <a:rPr lang="sk-SK" dirty="0">
+                <a:solidFill>
+                  <a:srgbClr val="FF0000"/>
+                </a:solidFill>
+                <a:highlight>
+                  <a:srgbClr val="00FFFF"/>
+                </a:highlight>
+              </a:rPr>
               <a:t>Repozitár vytvoríme pomocou príkazu</a:t>
             </a:r>
             <a:r>
-              <a:rPr lang="en-US" dirty="0"/>
+              <a:rPr lang="en-US" dirty="0">
+                <a:solidFill>
+                  <a:srgbClr val="FF0000"/>
+                </a:solidFill>
+                <a:highlight>
+                  <a:srgbClr val="00FFFF"/>
+                </a:highlight>
+              </a:rPr>
               <a:t> </a:t>
             </a:r>
             <a:r>
               <a:rPr lang="sk-SK" sz="2800" dirty="0">
+                <a:solidFill>
+                  <a:srgbClr val="FF0000"/>
+                </a:solidFill>
                 <a:highlight>
                   <a:srgbClr val="FFFF00"/>
                 </a:highlight>
@@ -4672,6 +4689,9 @@
             </a:r>
             <a:r>
               <a:rPr lang="sk-SK" sz="2800" dirty="0" err="1">
+                <a:solidFill>
+                  <a:srgbClr val="FF0000"/>
+                </a:solidFill>
                 <a:highlight>
                   <a:srgbClr val="FFFF00"/>
                 </a:highlight>
@@ -4680,6 +4700,9 @@
               <a:t>init</a:t>
             </a:r>
             <a:endParaRPr lang="sk-SK" sz="2800" dirty="0">
+              <a:solidFill>
+                <a:srgbClr val="FF0000"/>
+              </a:solidFill>
               <a:highlight>
                 <a:srgbClr val="FFFF00"/>
               </a:highlight>
@@ -4694,15 +4717,32 @@
               <a:buNone/>
             </a:pPr>
             <a:r>
-              <a:rPr lang="sk-SK" dirty="0"/>
+              <a:rPr lang="sk-SK" dirty="0">
+                <a:solidFill>
+                  <a:srgbClr val="FF0000"/>
+                </a:solidFill>
+                <a:highlight>
+                  <a:srgbClr val="00FFFF"/>
+                </a:highlight>
+              </a:rPr>
               <a:t>Existujúci repozitár stiahneme pomocou príkazu</a:t>
             </a:r>
             <a:r>
-              <a:rPr lang="en-US" dirty="0"/>
+              <a:rPr lang="en-US" dirty="0">
+                <a:solidFill>
+                  <a:srgbClr val="FF0000"/>
+                </a:solidFill>
+                <a:highlight>
+                  <a:srgbClr val="00FFFF"/>
+                </a:highlight>
+              </a:rPr>
               <a:t> </a:t>
             </a:r>
             <a:r>
               <a:rPr lang="sk-SK" sz="2800" dirty="0">
+                <a:solidFill>
+                  <a:srgbClr val="FF0000"/>
+                </a:solidFill>
                 <a:highlight>
                   <a:srgbClr val="FFFF00"/>
                 </a:highlight>
@@ -4712,6 +4752,9 @@
             </a:r>
             <a:r>
               <a:rPr lang="sk-SK" sz="2800" dirty="0" err="1">
+                <a:solidFill>
+                  <a:srgbClr val="FF0000"/>
+                </a:solidFill>
                 <a:highlight>
                   <a:srgbClr val="FFFF00"/>
                 </a:highlight>
@@ -4721,6 +4764,9 @@
             </a:r>
             <a:r>
               <a:rPr lang="sk-SK" sz="2800" dirty="0">
+                <a:solidFill>
+                  <a:srgbClr val="FF0000"/>
+                </a:solidFill>
                 <a:highlight>
                   <a:srgbClr val="FFFF00"/>
                 </a:highlight>
@@ -4729,6 +4775,9 @@
               <a:t>&gt;</a:t>
             </a:r>
             <a:endParaRPr lang="en-US" sz="2800" dirty="0">
+              <a:solidFill>
+                <a:srgbClr val="FF0000"/>
+              </a:solidFill>
               <a:highlight>
                 <a:srgbClr val="FFFF00"/>
               </a:highlight>
@@ -4875,19 +4924,47 @@
               <a:buNone/>
             </a:pPr>
             <a:r>
-              <a:rPr lang="sk-SK" dirty="0" err="1"/>
+              <a:rPr lang="sk-SK" dirty="0" err="1">
+                <a:solidFill>
+                  <a:srgbClr val="FF0000"/>
+                </a:solidFill>
+                <a:highlight>
+                  <a:srgbClr val="00FFFF"/>
+                </a:highlight>
+              </a:rPr>
               <a:t>Working</a:t>
             </a:r>
             <a:r>
-              <a:rPr lang="sk-SK" dirty="0"/>
+              <a:rPr lang="sk-SK" dirty="0">
+                <a:solidFill>
+                  <a:srgbClr val="FF0000"/>
+                </a:solidFill>
+                <a:highlight>
+                  <a:srgbClr val="00FFFF"/>
+                </a:highlight>
+              </a:rPr>
               <a:t> </a:t>
             </a:r>
             <a:r>
-              <a:rPr lang="sk-SK" dirty="0" err="1"/>
+              <a:rPr lang="sk-SK" dirty="0" err="1">
+                <a:solidFill>
+                  <a:srgbClr val="FF0000"/>
+                </a:solidFill>
+                <a:highlight>
+                  <a:srgbClr val="00FFFF"/>
+                </a:highlight>
+              </a:rPr>
               <a:t>tree</a:t>
             </a:r>
             <a:r>
-              <a:rPr lang="sk-SK" dirty="0"/>
+              <a:rPr lang="sk-SK" dirty="0">
+                <a:solidFill>
+                  <a:srgbClr val="FF0000"/>
+                </a:solidFill>
+                <a:highlight>
+                  <a:srgbClr val="00FFFF"/>
+                </a:highlight>
+              </a:rPr>
               <a:t> - Aktuálne súbory na disku s ktorými pracujeme</a:t>
             </a:r>
           </a:p>
@@ -4899,23 +4976,58 @@
               <a:buNone/>
             </a:pPr>
             <a:r>
-              <a:rPr lang="sk-SK" dirty="0"/>
+              <a:rPr lang="sk-SK" dirty="0">
+                <a:solidFill>
+                  <a:srgbClr val="FF0000"/>
+                </a:solidFill>
+                <a:highlight>
+                  <a:srgbClr val="00FFFF"/>
+                </a:highlight>
+              </a:rPr>
               <a:t>Index/</a:t>
             </a:r>
             <a:r>
-              <a:rPr lang="sk-SK" dirty="0" err="1"/>
+              <a:rPr lang="sk-SK" dirty="0" err="1">
+                <a:solidFill>
+                  <a:srgbClr val="FF0000"/>
+                </a:solidFill>
+                <a:highlight>
+                  <a:srgbClr val="00FFFF"/>
+                </a:highlight>
+              </a:rPr>
               <a:t>staging</a:t>
             </a:r>
             <a:r>
-              <a:rPr lang="sk-SK" dirty="0"/>
+              <a:rPr lang="sk-SK" dirty="0">
+                <a:solidFill>
+                  <a:srgbClr val="FF0000"/>
+                </a:solidFill>
+                <a:highlight>
+                  <a:srgbClr val="00FFFF"/>
+                </a:highlight>
+              </a:rPr>
               <a:t> - </a:t>
             </a:r>
             <a:r>
-              <a:rPr lang="sk-SK" dirty="0" err="1"/>
+              <a:rPr lang="sk-SK" dirty="0" err="1">
+                <a:solidFill>
+                  <a:srgbClr val="FF0000"/>
+                </a:solidFill>
+                <a:highlight>
+                  <a:srgbClr val="00FFFF"/>
+                </a:highlight>
+              </a:rPr>
               <a:t>Sada</a:t>
             </a:r>
             <a:r>
-              <a:rPr lang="sk-SK" dirty="0"/>
+              <a:rPr lang="sk-SK" dirty="0">
+                <a:solidFill>
+                  <a:srgbClr val="FF0000"/>
+                </a:solidFill>
+                <a:highlight>
+                  <a:srgbClr val="00FFFF"/>
+                </a:highlight>
+              </a:rPr>
               <a:t> zmien, ktoré chceme zapísať do repozitára</a:t>
             </a:r>
           </a:p>
@@ -4928,6 +5040,9 @@
             </a:pPr>
             <a:r>
               <a:rPr lang="sk-SK" dirty="0">
+                <a:solidFill>
+                  <a:srgbClr val="FF0000"/>
+                </a:solidFill>
                 <a:highlight>
                   <a:srgbClr val="FFFF00"/>
                 </a:highlight>
@@ -4937,6 +5052,9 @@
             </a:r>
             <a:r>
               <a:rPr lang="sk-SK" dirty="0" err="1">
+                <a:solidFill>
+                  <a:srgbClr val="FF0000"/>
+                </a:solidFill>
                 <a:highlight>
                   <a:srgbClr val="FFFF00"/>
                 </a:highlight>
@@ -4945,7 +5063,14 @@
               <a:t>add</a:t>
             </a:r>
             <a:r>
-              <a:rPr lang="sk-SK" dirty="0"/>
+              <a:rPr lang="sk-SK" dirty="0">
+                <a:solidFill>
+                  <a:srgbClr val="FF0000"/>
+                </a:solidFill>
+                <a:highlight>
+                  <a:srgbClr val="00FFFF"/>
+                </a:highlight>
+              </a:rPr>
               <a:t> - Do indexu pridáme zmeny pomocou </a:t>
             </a:r>
           </a:p>
@@ -4958,6 +5083,9 @@
             </a:pPr>
             <a:r>
               <a:rPr lang="sk-SK" dirty="0">
+                <a:solidFill>
+                  <a:srgbClr val="FF0000"/>
+                </a:solidFill>
                 <a:highlight>
                   <a:srgbClr val="FFFF00"/>
                 </a:highlight>
@@ -4966,8 +5094,19 @@
               <a:t>git status</a:t>
             </a:r>
             <a:r>
+              <a:rPr lang="sk-SK" dirty="0">
+                <a:solidFill>
+                  <a:srgbClr val="FF0000"/>
+                </a:solidFill>
+                <a:highlight>
+                  <a:srgbClr val="00FFFF"/>
+                </a:highlight>
+              </a:rPr>
+              <a:t> - Stav repozitára zistíme príkazom</a:t>
+            </a:r>
+            <a:r>
               <a:rPr lang="sk-SK" dirty="0"/>
-              <a:t> - Stav repozitára zistíme príkazom </a:t>
+              <a:t> </a:t>
             </a:r>
           </a:p>
           <a:p>
@@ -5111,11 +5250,25 @@
               <a:buNone/>
             </a:pPr>
             <a:r>
-              <a:rPr lang="sk-SK" dirty="0" err="1"/>
+              <a:rPr lang="sk-SK" dirty="0" err="1">
+                <a:solidFill>
+                  <a:srgbClr val="FF0000"/>
+                </a:solidFill>
+                <a:highlight>
+                  <a:srgbClr val="00FFFF"/>
+                </a:highlight>
+              </a:rPr>
               <a:t>Commit</a:t>
             </a:r>
             <a:r>
-              <a:rPr lang="sk-SK" dirty="0"/>
+              <a:rPr lang="sk-SK" dirty="0">
+                <a:solidFill>
+                  <a:srgbClr val="FF0000"/>
+                </a:solidFill>
+                <a:highlight>
+                  <a:srgbClr val="00FFFF"/>
+                </a:highlight>
+              </a:rPr>
               <a:t> je zápis súboru zmien v repozitári. Obsahuje:</a:t>
             </a:r>
           </a:p>
@@ -5126,7 +5279,14 @@
               </a:spcBef>
             </a:pPr>
             <a:r>
-              <a:rPr lang="sk-SK" sz="2800" dirty="0"/>
+              <a:rPr lang="sk-SK" sz="2800" dirty="0">
+                <a:solidFill>
+                  <a:srgbClr val="FF0000"/>
+                </a:solidFill>
+                <a:highlight>
+                  <a:srgbClr val="00FFFF"/>
+                </a:highlight>
+              </a:rPr>
               <a:t>Samotné zmeny v súboroch</a:t>
             </a:r>
           </a:p>
@@ -5137,7 +5297,14 @@
               </a:spcBef>
             </a:pPr>
             <a:r>
-              <a:rPr lang="sk-SK" sz="2800" dirty="0"/>
+              <a:rPr lang="sk-SK" sz="2800" dirty="0">
+                <a:solidFill>
+                  <a:srgbClr val="FF0000"/>
+                </a:solidFill>
+                <a:highlight>
+                  <a:srgbClr val="00FFFF"/>
+                </a:highlight>
+              </a:rPr>
               <a:t>Správa, čoho sa zmena týka</a:t>
             </a:r>
           </a:p>
@@ -5148,7 +5315,14 @@
               </a:spcBef>
             </a:pPr>
             <a:r>
-              <a:rPr lang="sk-SK" sz="2800" dirty="0"/>
+              <a:rPr lang="sk-SK" sz="2800" dirty="0">
+                <a:solidFill>
+                  <a:srgbClr val="FF0000"/>
+                </a:solidFill>
+                <a:highlight>
+                  <a:srgbClr val="00FFFF"/>
+                </a:highlight>
+              </a:rPr>
               <a:t>Dátum zápisu</a:t>
             </a:r>
           </a:p>
@@ -5159,7 +5333,14 @@
               </a:spcBef>
             </a:pPr>
             <a:r>
-              <a:rPr lang="sk-SK" sz="2800" dirty="0"/>
+              <a:rPr lang="sk-SK" sz="2800" dirty="0">
+                <a:solidFill>
+                  <a:srgbClr val="FF0000"/>
+                </a:solidFill>
+                <a:highlight>
+                  <a:srgbClr val="00FFFF"/>
+                </a:highlight>
+              </a:rPr>
               <a:t>Autora zápisu</a:t>
             </a:r>
           </a:p>
@@ -5170,15 +5351,36 @@
               </a:spcBef>
             </a:pPr>
             <a:r>
-              <a:rPr lang="sk-SK" sz="2800" dirty="0"/>
+              <a:rPr lang="sk-SK" sz="2800" dirty="0">
+                <a:solidFill>
+                  <a:srgbClr val="FF0000"/>
+                </a:solidFill>
+                <a:highlight>
+                  <a:srgbClr val="00FFFF"/>
+                </a:highlight>
+              </a:rPr>
               <a:t>Unikátny identifikátor zmeny (</a:t>
             </a:r>
             <a:r>
-              <a:rPr lang="sk-SK" sz="2800" dirty="0" err="1"/>
+              <a:rPr lang="sk-SK" sz="2800" dirty="0" err="1">
+                <a:solidFill>
+                  <a:srgbClr val="FF0000"/>
+                </a:solidFill>
+                <a:highlight>
+                  <a:srgbClr val="00FFFF"/>
+                </a:highlight>
+              </a:rPr>
               <a:t>hash</a:t>
             </a:r>
             <a:r>
-              <a:rPr lang="sk-SK" sz="2800" dirty="0"/>
+              <a:rPr lang="sk-SK" sz="2800" dirty="0">
+                <a:solidFill>
+                  <a:srgbClr val="FF0000"/>
+                </a:solidFill>
+                <a:highlight>
+                  <a:srgbClr val="00FFFF"/>
+                </a:highlight>
+              </a:rPr>
               <a:t>)</a:t>
             </a:r>
           </a:p>
@@ -5189,14 +5391,35 @@
               </a:spcBef>
             </a:pPr>
             <a:r>
-              <a:rPr lang="sk-SK" sz="2800" dirty="0"/>
+              <a:rPr lang="sk-SK" sz="2800" dirty="0">
+                <a:solidFill>
+                  <a:srgbClr val="FF0000"/>
+                </a:solidFill>
+                <a:highlight>
+                  <a:srgbClr val="00FFFF"/>
+                </a:highlight>
+              </a:rPr>
               <a:t>Odkaz na predchádzajúci </a:t>
             </a:r>
             <a:r>
-              <a:rPr lang="sk-SK" sz="2800" dirty="0" err="1"/>
+              <a:rPr lang="sk-SK" sz="2800" dirty="0" err="1">
+                <a:solidFill>
+                  <a:srgbClr val="FF0000"/>
+                </a:solidFill>
+                <a:highlight>
+                  <a:srgbClr val="00FFFF"/>
+                </a:highlight>
+              </a:rPr>
               <a:t>commit</a:t>
             </a:r>
-            <a:endParaRPr lang="sk-SK" sz="2800" dirty="0"/>
+            <a:endParaRPr lang="sk-SK" sz="2800" dirty="0">
+              <a:solidFill>
+                <a:srgbClr val="FF0000"/>
+              </a:solidFill>
+              <a:highlight>
+                <a:srgbClr val="00FFFF"/>
+              </a:highlight>
+            </a:endParaRPr>
           </a:p>
         </p:txBody>
       </p:sp>
@@ -5222,11 +5445,25 @@
           <a:lstStyle/>
           <a:p>
             <a:r>
-              <a:rPr lang="sk-SK" dirty="0" err="1"/>
+              <a:rPr lang="sk-SK" dirty="0" err="1">
+                <a:solidFill>
+                  <a:srgbClr val="FF0000"/>
+                </a:solidFill>
+                <a:highlight>
+                  <a:srgbClr val="00FFFF"/>
+                </a:highlight>
+              </a:rPr>
               <a:t>Commit</a:t>
             </a:r>
             <a:r>
-              <a:rPr lang="sk-SK" dirty="0"/>
+              <a:rPr lang="sk-SK" dirty="0">
+                <a:solidFill>
+                  <a:srgbClr val="FF0000"/>
+                </a:solidFill>
+                <a:highlight>
+                  <a:srgbClr val="00FFFF"/>
+                </a:highlight>
+              </a:rPr>
               <a:t> – zápis zmien</a:t>
             </a:r>
           </a:p>
@@ -5312,6 +5549,9 @@
             </a:pPr>
             <a:r>
               <a:rPr lang="sk-SK" dirty="0">
+                <a:solidFill>
+                  <a:srgbClr val="FF0000"/>
+                </a:solidFill>
                 <a:highlight>
                   <a:srgbClr val="FFFF00"/>
                 </a:highlight>
@@ -5321,6 +5561,9 @@
             </a:r>
             <a:r>
               <a:rPr lang="sk-SK" dirty="0" err="1">
+                <a:solidFill>
+                  <a:srgbClr val="FF0000"/>
+                </a:solidFill>
                 <a:highlight>
                   <a:srgbClr val="FFFF00"/>
                 </a:highlight>
@@ -5330,6 +5573,9 @@
             </a:r>
             <a:r>
               <a:rPr lang="sk-SK" dirty="0">
+                <a:solidFill>
+                  <a:srgbClr val="FF0000"/>
+                </a:solidFill>
                 <a:highlight>
                   <a:srgbClr val="FFFF00"/>
                 </a:highlight>
@@ -5338,7 +5584,14 @@
               <a:t> -m "popis zmien"</a:t>
             </a:r>
             <a:r>
-              <a:rPr lang="sk-SK" dirty="0"/>
+              <a:rPr lang="sk-SK" dirty="0">
+                <a:solidFill>
+                  <a:srgbClr val="FF0000"/>
+                </a:solidFill>
+                <a:highlight>
+                  <a:srgbClr val="00FFFF"/>
+                </a:highlight>
+              </a:rPr>
               <a:t> - Zápis sady zmien </a:t>
             </a:r>
           </a:p>
@@ -5351,6 +5604,9 @@
             </a:pPr>
             <a:r>
               <a:rPr lang="sk-SK" dirty="0">
+                <a:solidFill>
+                  <a:srgbClr val="FF0000"/>
+                </a:solidFill>
                 <a:highlight>
                   <a:srgbClr val="FFFF00"/>
                 </a:highlight>
@@ -5359,14 +5615,35 @@
               <a:t>git log</a:t>
             </a:r>
             <a:r>
-              <a:rPr lang="sk-SK" dirty="0"/>
+              <a:rPr lang="sk-SK" dirty="0">
+                <a:solidFill>
+                  <a:srgbClr val="FF0000"/>
+                </a:solidFill>
+                <a:highlight>
+                  <a:srgbClr val="00FFFF"/>
+                </a:highlight>
+              </a:rPr>
               <a:t> - Zoznam posledných </a:t>
             </a:r>
             <a:r>
-              <a:rPr lang="sk-SK" dirty="0" err="1"/>
+              <a:rPr lang="sk-SK" dirty="0" err="1">
+                <a:solidFill>
+                  <a:srgbClr val="FF0000"/>
+                </a:solidFill>
+                <a:highlight>
+                  <a:srgbClr val="00FFFF"/>
+                </a:highlight>
+              </a:rPr>
               <a:t>commitov</a:t>
             </a:r>
-            <a:endParaRPr lang="sk-SK" dirty="0"/>
+            <a:endParaRPr lang="sk-SK" dirty="0">
+              <a:solidFill>
+                <a:srgbClr val="FF0000"/>
+              </a:solidFill>
+              <a:highlight>
+                <a:srgbClr val="00FFFF"/>
+              </a:highlight>
+            </a:endParaRPr>
           </a:p>
           <a:p>
             <a:pPr marL="0" indent="0">
@@ -5377,6 +5654,9 @@
             </a:pPr>
             <a:r>
               <a:rPr lang="sk-SK" dirty="0">
+                <a:solidFill>
+                  <a:srgbClr val="FF0000"/>
+                </a:solidFill>
                 <a:highlight>
                   <a:srgbClr val="FFFF00"/>
                 </a:highlight>
@@ -5386,6 +5666,9 @@
             </a:r>
             <a:r>
               <a:rPr lang="sk-SK" dirty="0" err="1">
+                <a:solidFill>
+                  <a:srgbClr val="FF0000"/>
+                </a:solidFill>
                 <a:highlight>
                   <a:srgbClr val="FFFF00"/>
                 </a:highlight>
@@ -5394,7 +5677,14 @@
               <a:t>diff</a:t>
             </a:r>
             <a:r>
-              <a:rPr lang="sk-SK" dirty="0"/>
+              <a:rPr lang="sk-SK" dirty="0">
+                <a:solidFill>
+                  <a:srgbClr val="FF0000"/>
+                </a:solidFill>
+                <a:highlight>
+                  <a:srgbClr val="00FFFF"/>
+                </a:highlight>
+              </a:rPr>
               <a:t> - Prehľad zmien, ktoré nie sú ešte v indexe</a:t>
             </a:r>
           </a:p>
@@ -5407,6 +5697,9 @@
             </a:pPr>
             <a:r>
               <a:rPr lang="sk-SK" dirty="0" err="1">
+                <a:solidFill>
+                  <a:srgbClr val="FF0000"/>
+                </a:solidFill>
                 <a:highlight>
                   <a:srgbClr val="FFFF00"/>
                 </a:highlight>
@@ -5415,7 +5708,14 @@
               <a:t>gitk</a:t>
             </a:r>
             <a:r>
-              <a:rPr lang="sk-SK" dirty="0"/>
+              <a:rPr lang="sk-SK" dirty="0">
+                <a:solidFill>
+                  <a:srgbClr val="FF0000"/>
+                </a:solidFill>
+                <a:highlight>
+                  <a:srgbClr val="00FFFF"/>
+                </a:highlight>
+              </a:rPr>
               <a:t> - GUI nástroj</a:t>
             </a:r>
           </a:p>
@@ -5504,11 +5804,25 @@
           <a:lstStyle/>
           <a:p>
             <a:r>
-              <a:rPr lang="sk-SK" dirty="0" err="1"/>
+              <a:rPr lang="sk-SK" dirty="0" err="1">
+                <a:solidFill>
+                  <a:srgbClr val="FF0000"/>
+                </a:solidFill>
+                <a:highlight>
+                  <a:srgbClr val="00FFFF"/>
+                </a:highlight>
+              </a:rPr>
               <a:t>Commit</a:t>
             </a:r>
             <a:r>
-              <a:rPr lang="sk-SK" dirty="0"/>
+              <a:rPr lang="sk-SK" dirty="0">
+                <a:solidFill>
+                  <a:srgbClr val="FF0000"/>
+                </a:solidFill>
+                <a:highlight>
+                  <a:srgbClr val="00FFFF"/>
+                </a:highlight>
+              </a:rPr>
               <a:t> – zápis zmien</a:t>
             </a:r>
           </a:p>
@@ -5701,6 +6015,9 @@
             </a:pPr>
             <a:r>
               <a:rPr lang="sk-SK" dirty="0">
+                <a:solidFill>
+                  <a:srgbClr val="FF0000"/>
+                </a:solidFill>
                 <a:highlight>
                   <a:srgbClr val="FFFF00"/>
                 </a:highlight>
@@ -5710,6 +6027,9 @@
             </a:r>
             <a:r>
               <a:rPr lang="sk-SK" dirty="0" err="1">
+                <a:solidFill>
+                  <a:srgbClr val="FF0000"/>
+                </a:solidFill>
                 <a:highlight>
                   <a:srgbClr val="FFFF00"/>
                 </a:highlight>
@@ -5719,6 +6039,9 @@
             </a:r>
             <a:r>
               <a:rPr lang="sk-SK" dirty="0">
+                <a:solidFill>
+                  <a:srgbClr val="FF0000"/>
+                </a:solidFill>
                 <a:highlight>
                   <a:srgbClr val="FFFF00"/>
                 </a:highlight>
@@ -5728,6 +6051,9 @@
             </a:r>
             <a:r>
               <a:rPr lang="sk-SK" dirty="0" err="1">
+                <a:solidFill>
+                  <a:srgbClr val="FF0000"/>
+                </a:solidFill>
                 <a:highlight>
                   <a:srgbClr val="FFFF00"/>
                 </a:highlight>
@@ -5737,6 +6063,9 @@
             </a:r>
             <a:r>
               <a:rPr lang="sk-SK" dirty="0">
+                <a:solidFill>
+                  <a:srgbClr val="FF0000"/>
+                </a:solidFill>
                 <a:highlight>
                   <a:srgbClr val="FFFF00"/>
                 </a:highlight>
@@ -5745,7 +6074,14 @@
               <a:t>&gt;</a:t>
             </a:r>
             <a:r>
-              <a:rPr lang="sk-SK" dirty="0"/>
+              <a:rPr lang="sk-SK" dirty="0">
+                <a:solidFill>
+                  <a:srgbClr val="FF0000"/>
+                </a:solidFill>
+                <a:highlight>
+                  <a:srgbClr val="00FFFF"/>
+                </a:highlight>
+              </a:rPr>
               <a:t> - vytvorenie novej vetvy</a:t>
             </a:r>
           </a:p>
@@ -5758,6 +6094,9 @@
             </a:pPr>
             <a:r>
               <a:rPr lang="sk-SK" dirty="0">
+                <a:solidFill>
+                  <a:srgbClr val="FF0000"/>
+                </a:solidFill>
                 <a:highlight>
                   <a:srgbClr val="FFFF00"/>
                 </a:highlight>
@@ -5767,6 +6106,9 @@
             </a:r>
             <a:r>
               <a:rPr lang="sk-SK" dirty="0" err="1">
+                <a:solidFill>
+                  <a:srgbClr val="FF0000"/>
+                </a:solidFill>
                 <a:highlight>
                   <a:srgbClr val="FFFF00"/>
                 </a:highlight>
@@ -5776,6 +6118,9 @@
             </a:r>
             <a:r>
               <a:rPr lang="sk-SK" dirty="0">
+                <a:solidFill>
+                  <a:srgbClr val="FF0000"/>
+                </a:solidFill>
                 <a:highlight>
                   <a:srgbClr val="FFFF00"/>
                 </a:highlight>
@@ -5785,6 +6130,9 @@
             </a:r>
             <a:r>
               <a:rPr lang="sk-SK" dirty="0" err="1">
+                <a:solidFill>
+                  <a:srgbClr val="FF0000"/>
+                </a:solidFill>
                 <a:highlight>
                   <a:srgbClr val="FFFF00"/>
                 </a:highlight>
@@ -5794,6 +6142,9 @@
             </a:r>
             <a:r>
               <a:rPr lang="sk-SK" dirty="0">
+                <a:solidFill>
+                  <a:srgbClr val="FF0000"/>
+                </a:solidFill>
                 <a:highlight>
                   <a:srgbClr val="FFFF00"/>
                 </a:highlight>
@@ -5802,7 +6153,14 @@
               <a:t>&gt;</a:t>
             </a:r>
             <a:r>
-              <a:rPr lang="sk-SK" dirty="0"/>
+              <a:rPr lang="sk-SK" dirty="0">
+                <a:solidFill>
+                  <a:srgbClr val="FF0000"/>
+                </a:solidFill>
+                <a:highlight>
+                  <a:srgbClr val="00FFFF"/>
+                </a:highlight>
+              </a:rPr>
               <a:t> - prepnutie to inej vetvy</a:t>
             </a:r>
           </a:p>
@@ -5815,6 +6173,9 @@
             </a:pPr>
             <a:r>
               <a:rPr lang="sk-SK" dirty="0">
+                <a:solidFill>
+                  <a:srgbClr val="FF0000"/>
+                </a:solidFill>
                 <a:highlight>
                   <a:srgbClr val="FFFF00"/>
                 </a:highlight>
@@ -5824,6 +6185,9 @@
             </a:r>
             <a:r>
               <a:rPr lang="sk-SK" dirty="0" err="1">
+                <a:solidFill>
+                  <a:srgbClr val="FF0000"/>
+                </a:solidFill>
                 <a:highlight>
                   <a:srgbClr val="FFFF00"/>
                 </a:highlight>
@@ -5833,6 +6197,9 @@
             </a:r>
             <a:r>
               <a:rPr lang="sk-SK" dirty="0">
+                <a:solidFill>
+                  <a:srgbClr val="FF0000"/>
+                </a:solidFill>
                 <a:highlight>
                   <a:srgbClr val="FFFF00"/>
                 </a:highlight>
@@ -5842,6 +6209,9 @@
             </a:r>
             <a:r>
               <a:rPr lang="sk-SK" dirty="0" err="1">
+                <a:solidFill>
+                  <a:srgbClr val="FF0000"/>
+                </a:solidFill>
                 <a:highlight>
                   <a:srgbClr val="FFFF00"/>
                 </a:highlight>
@@ -5851,6 +6221,9 @@
             </a:r>
             <a:r>
               <a:rPr lang="sk-SK" dirty="0">
+                <a:solidFill>
+                  <a:srgbClr val="FF0000"/>
+                </a:solidFill>
                 <a:highlight>
                   <a:srgbClr val="FFFF00"/>
                 </a:highlight>
@@ -5859,7 +6232,14 @@
               <a:t>&gt;</a:t>
             </a:r>
             <a:r>
-              <a:rPr lang="sk-SK" dirty="0"/>
+              <a:rPr lang="sk-SK" dirty="0">
+                <a:solidFill>
+                  <a:srgbClr val="FF0000"/>
+                </a:solidFill>
+                <a:highlight>
+                  <a:srgbClr val="00FFFF"/>
+                </a:highlight>
+              </a:rPr>
               <a:t> - zlúčenie inej vetvy do aktuálnej</a:t>
             </a:r>
           </a:p>
@@ -5872,6 +6252,9 @@
             </a:pPr>
             <a:r>
               <a:rPr lang="sk-SK" dirty="0">
+                <a:solidFill>
+                  <a:srgbClr val="FF0000"/>
+                </a:solidFill>
                 <a:highlight>
                   <a:srgbClr val="FFFF00"/>
                 </a:highlight>
@@ -5881,6 +6264,9 @@
             </a:r>
             <a:r>
               <a:rPr lang="sk-SK" dirty="0" err="1">
+                <a:solidFill>
+                  <a:srgbClr val="FF0000"/>
+                </a:solidFill>
                 <a:highlight>
                   <a:srgbClr val="FFFF00"/>
                 </a:highlight>
@@ -5890,6 +6276,9 @@
             </a:r>
             <a:r>
               <a:rPr lang="sk-SK" dirty="0">
+                <a:solidFill>
+                  <a:srgbClr val="FF0000"/>
+                </a:solidFill>
                 <a:highlight>
                   <a:srgbClr val="FFFF00"/>
                 </a:highlight>
@@ -5899,6 +6288,9 @@
             </a:r>
             <a:r>
               <a:rPr lang="sk-SK" dirty="0" err="1">
+                <a:solidFill>
+                  <a:srgbClr val="FF0000"/>
+                </a:solidFill>
                 <a:highlight>
                   <a:srgbClr val="FFFF00"/>
                 </a:highlight>
@@ -5907,7 +6299,14 @@
               <a:t>av</a:t>
             </a:r>
             <a:r>
-              <a:rPr lang="sk-SK" dirty="0"/>
+              <a:rPr lang="sk-SK" dirty="0">
+                <a:solidFill>
+                  <a:srgbClr val="FF0000"/>
+                </a:solidFill>
+                <a:highlight>
+                  <a:srgbClr val="00FFFF"/>
+                </a:highlight>
+              </a:rPr>
               <a:t> - Zoznam všetkých vetiev</a:t>
             </a:r>
           </a:p>
@@ -5977,7 +6376,14 @@
           <a:lstStyle/>
           <a:p>
             <a:r>
-              <a:rPr lang="sk-SK" dirty="0"/>
+              <a:rPr lang="sk-SK" dirty="0">
+                <a:solidFill>
+                  <a:srgbClr val="FF0000"/>
+                </a:solidFill>
+                <a:highlight>
+                  <a:srgbClr val="00FFFF"/>
+                </a:highlight>
+              </a:rPr>
               <a:t>Vetvy zmien</a:t>
             </a:r>
           </a:p>
